--- a/system-design-101/vi/lessons/sd-13-009/slides/sd-13-009.pptx
+++ b/system-design-101/vi/lessons/sd-13-009/slides/sd-13-009.pptx
@@ -1709,7 +1709,7 @@
         <p:spPr>
           <a:xfrm>
             <a:off x="914400" y="1333500"/>
-            <a:ext cx="16459200" cy="3238500"/>
+            <a:ext cx="16459200" cy="3429000"/>
           </a:xfrm>
           <a:prstGeom prst="rect">
             <a:avLst/>
@@ -1718,17 +1718,17 @@
           <a:ln/>
         </p:spPr>
         <p:txBody>
-          <a:bodyPr wrap="square" lIns="0" tIns="54784" rIns="0" bIns="-54784" rtlCol="0" anchor="t"/>
+          <a:bodyPr wrap="square" lIns="0" tIns="61722" rIns="0" bIns="-61722" rtlCol="0" anchor="t"/>
           <a:lstStyle/>
           <a:p>
             <a:pPr algn="l" indent="0" marL="0">
               <a:lnSpc>
-                <a:spcPts val="7764"/>
+                <a:spcPts val="8748"/>
               </a:lnSpc>
               <a:buNone/>
             </a:pPr>
             <a:r>
-              <a:rPr lang="en-US" sz="7189" dirty="0" spc="4" kern="0">
+              <a:rPr lang="en-US" sz="8100" dirty="0" spc="6" kern="0">
                 <a:solidFill>
                   <a:srgbClr val="F3EEE3"/>
                 </a:solidFill>
@@ -1739,7 +1739,7 @@
               <a:t>Cụm</a:t>
             </a:r>
             <a:r>
-              <a:rPr lang="en-US" sz="7189" dirty="0" spc="-26" kern="0">
+              <a:rPr lang="en-US" sz="8100" dirty="0" spc="-29" kern="0">
                 <a:solidFill>
                   <a:srgbClr val="F3EEE3"/>
                 </a:solidFill>
@@ -1750,7 +1750,7 @@
               <a:t> Kubernetes</a:t>
             </a:r>
             <a:r>
-              <a:rPr lang="en-US" sz="7189" dirty="0" spc="2" kern="0">
+              <a:rPr lang="en-US" sz="8100" dirty="0" spc="-1" kern="0">
                 <a:solidFill>
                   <a:srgbClr val="F3EEE3"/>
                 </a:solidFill>
@@ -1761,7 +1761,7 @@
               <a:t> cần</a:t>
             </a:r>
             <a:r>
-              <a:rPr lang="en-US" sz="7189" dirty="0" spc="0" kern="0">
+              <a:rPr lang="en-US" sz="8100" dirty="0" spc="4" kern="0">
                 <a:solidFill>
                   <a:srgbClr val="F3EEE3"/>
                 </a:solidFill>
@@ -1769,10 +1769,10 @@
                 <a:ea typeface="Bricolage Grotesque ExtraBold" pitchFamily="34" charset="-122"/>
                 <a:cs typeface="Bricolage Grotesque ExtraBold" pitchFamily="34" charset="-120"/>
               </a:rPr>
-              <a:t> thêm công cụ</a:t>
-            </a:r>
-            <a:r>
-              <a:rPr lang="en-US" sz="7189" dirty="0" spc="3" kern="0">
+              <a:t> thêm</a:t>
+            </a:r>
+            <a:r>
+              <a:rPr lang="en-US" sz="8100" dirty="0" spc="1" kern="0">
                 <a:solidFill>
                   <a:srgbClr val="F3EEE3"/>
                 </a:solidFill>
@@ -1780,10 +1780,10 @@
                 <a:ea typeface="Bricolage Grotesque ExtraBold" pitchFamily="34" charset="-122"/>
                 <a:cs typeface="Bricolage Grotesque ExtraBold" pitchFamily="34" charset="-120"/>
               </a:rPr>
-              <a:t> nào</a:t>
-            </a:r>
-            <a:r>
-              <a:rPr lang="en-US" sz="7189" dirty="0" spc="-69" kern="0">
+              <a:t> công</a:t>
+            </a:r>
+            <a:r>
+              <a:rPr lang="en-US" sz="8100" dirty="0" spc="-2" kern="0">
                 <a:solidFill>
                   <a:srgbClr val="F3EEE3"/>
                 </a:solidFill>
@@ -1791,10 +1791,10 @@
                 <a:ea typeface="Bricolage Grotesque ExtraBold" pitchFamily="34" charset="-122"/>
                 <a:cs typeface="Bricolage Grotesque ExtraBold" pitchFamily="34" charset="-120"/>
               </a:rPr>
-              <a:t> trước:</a:t>
-            </a:r>
-            <a:r>
-              <a:rPr lang="en-US" sz="7189" dirty="0" spc="35" kern="0">
+              <a:t> cụ</a:t>
+            </a:r>
+            <a:r>
+              <a:rPr lang="en-US" sz="8100" dirty="0" spc="2" kern="0">
                 <a:solidFill>
                   <a:srgbClr val="F3EEE3"/>
                 </a:solidFill>
@@ -1802,10 +1802,10 @@
                 <a:ea typeface="Bricolage Grotesque ExtraBold" pitchFamily="34" charset="-122"/>
                 <a:cs typeface="Bricolage Grotesque ExtraBold" pitchFamily="34" charset="-120"/>
               </a:rPr>
-              <a:t> đi</a:t>
-            </a:r>
-            <a:r>
-              <a:rPr lang="en-US" sz="7189" dirty="0" spc="-4" kern="0">
+              <a:t> nào</a:t>
+            </a:r>
+            <a:r>
+              <a:rPr lang="en-US" sz="8100" dirty="0" spc="-74" kern="0">
                 <a:solidFill>
                   <a:srgbClr val="F3EEE3"/>
                 </a:solidFill>
@@ -1813,10 +1813,10 @@
                 <a:ea typeface="Bricolage Grotesque ExtraBold" pitchFamily="34" charset="-122"/>
                 <a:cs typeface="Bricolage Grotesque ExtraBold" pitchFamily="34" charset="-120"/>
               </a:rPr>
-              <a:t> từ</a:t>
-            </a:r>
-            <a:r>
-              <a:rPr lang="en-US" sz="7189" dirty="0" spc="2" kern="0">
+              <a:t> trước:</a:t>
+            </a:r>
+            <a:r>
+              <a:rPr lang="en-US" sz="8100" dirty="0" spc="39" kern="0">
                 <a:solidFill>
                   <a:srgbClr val="F3EEE3"/>
                 </a:solidFill>
@@ -1824,10 +1824,10 @@
                 <a:ea typeface="Bricolage Grotesque ExtraBold" pitchFamily="34" charset="-122"/>
                 <a:cs typeface="Bricolage Grotesque ExtraBold" pitchFamily="34" charset="-120"/>
               </a:rPr>
-              <a:t> triệu</a:t>
-            </a:r>
-            <a:r>
-              <a:rPr lang="en-US" sz="7189" dirty="0" spc="6" kern="0">
+              <a:t> đi</a:t>
+            </a:r>
+            <a:r>
+              <a:rPr lang="en-US" sz="8100" dirty="0" spc="0" kern="0">
                 <a:solidFill>
                   <a:srgbClr val="F3EEE3"/>
                 </a:solidFill>
@@ -1835,9 +1835,31 @@
                 <a:ea typeface="Bricolage Grotesque ExtraBold" pitchFamily="34" charset="-122"/>
                 <a:cs typeface="Bricolage Grotesque ExtraBold" pitchFamily="34" charset="-120"/>
               </a:rPr>
+              <a:t> từ</a:t>
+            </a:r>
+            <a:r>
+              <a:rPr lang="en-US" sz="8100" dirty="0" spc="4" kern="0">
+                <a:solidFill>
+                  <a:srgbClr val="F3EEE3"/>
+                </a:solidFill>
+                <a:latin typeface="Bricolage Grotesque ExtraBold" pitchFamily="34" charset="0"/>
+                <a:ea typeface="Bricolage Grotesque ExtraBold" pitchFamily="34" charset="-122"/>
+                <a:cs typeface="Bricolage Grotesque ExtraBold" pitchFamily="34" charset="-120"/>
+              </a:rPr>
+              <a:t> triệu</a:t>
+            </a:r>
+            <a:r>
+              <a:rPr lang="en-US" sz="8100" dirty="0" spc="7" kern="0">
+                <a:solidFill>
+                  <a:srgbClr val="F3EEE3"/>
+                </a:solidFill>
+                <a:latin typeface="Bricolage Grotesque ExtraBold" pitchFamily="34" charset="0"/>
+                <a:ea typeface="Bricolage Grotesque ExtraBold" pitchFamily="34" charset="-122"/>
+                <a:cs typeface="Bricolage Grotesque ExtraBold" pitchFamily="34" charset="-120"/>
+              </a:rPr>
               <a:t> chứng</a:t>
             </a:r>
-            <a:endParaRPr lang="en-US" sz="7189" dirty="0"/>
+            <a:endParaRPr lang="en-US" sz="8100" dirty="0"/>
           </a:p>
         </p:txBody>
       </p:sp>
@@ -2307,90 +2329,7 @@
       </p:sp>
       <p:sp>
         <p:nvSpPr>
-          <p:cNvPr id="9" name="Text 7"/>
-          <p:cNvSpPr/>
-          <p:nvPr/>
-        </p:nvSpPr>
-        <p:spPr>
-          <a:xfrm>
-            <a:off x="914400" y="9525000"/>
-            <a:ext cx="8572500" cy="342900"/>
-          </a:xfrm>
-          <a:prstGeom prst="rect">
-            <a:avLst/>
-          </a:prstGeom>
-          <a:noFill/>
-          <a:ln/>
-        </p:spPr>
-        <p:txBody>
-          <a:bodyPr wrap="square" lIns="0" tIns="0" rIns="0" bIns="0" rtlCol="0" anchor="t"/>
-          <a:lstStyle/>
-          <a:p>
-            <a:pPr algn="l" indent="0" marL="0">
-              <a:buNone/>
-            </a:pPr>
-            <a:r>
-              <a:rPr lang="en-US" sz="1800" dirty="0" spc="-13" kern="0">
-                <a:solidFill>
-                  <a:srgbClr val="9AA0B5"/>
-                </a:solidFill>
-                <a:latin typeface="Be Vietnam Pro" pitchFamily="34" charset="0"/>
-                <a:ea typeface="Be Vietnam Pro" pitchFamily="34" charset="-122"/>
-                <a:cs typeface="Be Vietnam Pro" pitchFamily="34" charset="-120"/>
-              </a:rPr>
-              <a:t>System</a:t>
-            </a:r>
-            <a:r>
-              <a:rPr lang="en-US" sz="1800" dirty="0" spc="-1" kern="0">
-                <a:solidFill>
-                  <a:srgbClr val="9AA0B5"/>
-                </a:solidFill>
-                <a:latin typeface="Be Vietnam Pro" pitchFamily="34" charset="0"/>
-                <a:ea typeface="Be Vietnam Pro" pitchFamily="34" charset="-122"/>
-                <a:cs typeface="Be Vietnam Pro" pitchFamily="34" charset="-120"/>
-              </a:rPr>
-              <a:t> Design</a:t>
-            </a:r>
-            <a:r>
-              <a:rPr lang="en-US" sz="1800" dirty="0" spc="4" kern="0">
-                <a:solidFill>
-                  <a:srgbClr val="9AA0B5"/>
-                </a:solidFill>
-                <a:latin typeface="Be Vietnam Pro" pitchFamily="34" charset="0"/>
-                <a:ea typeface="Be Vietnam Pro" pitchFamily="34" charset="-122"/>
-                <a:cs typeface="Be Vietnam Pro" pitchFamily="34" charset="-120"/>
-              </a:rPr>
-              <a:t> 101</a:t>
-            </a:r>
-            <a:r>
-              <a:rPr lang="en-US" sz="1800" dirty="0" spc="-2" kern="0">
-                <a:solidFill>
-                  <a:srgbClr val="9AA0B5"/>
-                </a:solidFill>
-                <a:latin typeface="Be Vietnam Pro" pitchFamily="34" charset="0"/>
-                <a:ea typeface="Be Vietnam Pro" pitchFamily="34" charset="-122"/>
-                <a:cs typeface="Be Vietnam Pro" pitchFamily="34" charset="-120"/>
-              </a:rPr>
-              <a:t> ·</a:t>
-            </a:r>
-            <a:r>
-              <a:rPr lang="en-US" sz="1800" dirty="0" spc="1" kern="0">
-                <a:solidFill>
-                  <a:srgbClr val="9AA0B5"/>
-                </a:solidFill>
-                <a:latin typeface="Be Vietnam Pro" pitchFamily="34" charset="0"/>
-                <a:ea typeface="Be Vietnam Pro" pitchFamily="34" charset="-122"/>
-                <a:cs typeface="Be Vietnam Pro" pitchFamily="34" charset="-120"/>
-              </a:rPr>
-              <a:t> Bài 09</a:t>
-            </a:r>
-            <a:endParaRPr lang="en-US" sz="1800" dirty="0"/>
-          </a:p>
-        </p:txBody>
-      </p:sp>
-      <p:sp>
-        <p:nvSpPr>
-          <p:cNvPr id="10" name="Shape 8"/>
+          <p:cNvPr id="9" name="Shape 7"/>
           <p:cNvSpPr/>
           <p:nvPr/>
         </p:nvSpPr>
@@ -2414,7 +2353,7 @@
       </p:sp>
       <p:pic>
         <p:nvPicPr>
-          <p:cNvPr id="11" name="Moda image moda-export-watermark-b83ffa79-e3e0-43f4-a3d4-d6372c71c962" descr="">    </p:cNvPr>
+          <p:cNvPr id="10" name="Moda image moda-export-watermark-b83ffa79-e3e0-43f4-a3d4-d6372c71c962" descr="">    </p:cNvPr>
           <p:cNvPicPr>
             <a:picLocks noChangeAspect="1"/>
           </p:cNvPicPr>

--- a/system-design-101/vi/lessons/sd-13-009/slides/sd-13-009.pptx
+++ b/system-design-101/vi/lessons/sd-13-009/slides/sd-13-009.pptx
@@ -7931,7 +7931,7 @@
         <p:spPr>
           <a:xfrm>
             <a:off x="914400" y="1238250"/>
-            <a:ext cx="16459200" cy="1238250"/>
+            <a:ext cx="16459200" cy="1143000"/>
           </a:xfrm>
           <a:prstGeom prst="rect">
             <a:avLst/>
@@ -7947,7 +7947,7 @@
               <a:buNone/>
             </a:pPr>
             <a:r>
-              <a:rPr lang="en-US" sz="5700" dirty="0" spc="-64" kern="0">
+              <a:rPr lang="en-US" sz="6900" dirty="0" spc="-79" kern="0">
                 <a:solidFill>
                   <a:srgbClr val="F3EEE3"/>
                 </a:solidFill>
@@ -7958,7 +7958,7 @@
               <a:t>Sửa</a:t>
             </a:r>
             <a:r>
-              <a:rPr lang="en-US" sz="5700" dirty="0" spc="-8" kern="0">
+              <a:rPr lang="en-US" sz="6900" dirty="0" spc="-7" kern="0">
                 <a:solidFill>
                   <a:srgbClr val="F3EEE3"/>
                 </a:solidFill>
@@ -7969,7 +7969,7 @@
               <a:t> tay</a:t>
             </a:r>
             <a:r>
-              <a:rPr lang="en-US" sz="5700" dirty="0" spc="0" kern="0">
+              <a:rPr lang="en-US" sz="6900" dirty="0" spc="9" kern="0">
                 <a:solidFill>
                   <a:srgbClr val="F3EEE3"/>
                 </a:solidFill>
@@ -7977,10 +7977,10 @@
                 <a:ea typeface="Bricolage Grotesque ExtraBold" pitchFamily="34" charset="-122"/>
                 <a:cs typeface="Bricolage Grotesque ExtraBold" pitchFamily="34" charset="-120"/>
               </a:rPr>
-              <a:t> Deployment</a:t>
-            </a:r>
-            <a:r>
-              <a:rPr lang="en-US" sz="5700" dirty="0" spc="-3" kern="0">
+              <a:t> Deployment,</a:t>
+            </a:r>
+            <a:r>
+              <a:rPr lang="en-US" sz="6900" dirty="0" spc="-52" kern="0">
                 <a:solidFill>
                   <a:srgbClr val="F3EEE3"/>
                 </a:solidFill>
@@ -7988,10 +7988,10 @@
                 <a:ea typeface="Bricolage Grotesque ExtraBold" pitchFamily="34" charset="-122"/>
                 <a:cs typeface="Bricolage Grotesque ExtraBold" pitchFamily="34" charset="-120"/>
               </a:rPr>
-              <a:t> bằng</a:t>
-            </a:r>
-            <a:r>
-              <a:rPr lang="en-US" sz="5700" dirty="0" spc="-6" kern="0">
+              <a:t> Argo</a:t>
+            </a:r>
+            <a:r>
+              <a:rPr lang="en-US" sz="6900" dirty="0" spc="1" kern="0">
                 <a:solidFill>
                   <a:srgbClr val="F3EEE3"/>
                 </a:solidFill>
@@ -7999,10 +7999,10 @@
                 <a:ea typeface="Bricolage Grotesque ExtraBold" pitchFamily="34" charset="-122"/>
                 <a:cs typeface="Bricolage Grotesque ExtraBold" pitchFamily="34" charset="-120"/>
               </a:rPr>
-              <a:t> kubectl.</a:t>
-            </a:r>
-            <a:r>
-              <a:rPr lang="en-US" sz="5700" dirty="0" spc="-42" kern="0">
+              <a:t> CD</a:t>
+            </a:r>
+            <a:r>
+              <a:rPr lang="en-US" sz="6900" dirty="0" spc="-1" kern="0">
                 <a:solidFill>
                   <a:srgbClr val="F3EEE3"/>
                 </a:solidFill>
@@ -8010,10 +8010,10 @@
                 <a:ea typeface="Bricolage Grotesque ExtraBold" pitchFamily="34" charset="-122"/>
                 <a:cs typeface="Bricolage Grotesque ExtraBold" pitchFamily="34" charset="-120"/>
               </a:rPr>
-              <a:t> Argo</a:t>
-            </a:r>
-            <a:r>
-              <a:rPr lang="en-US" sz="5700" dirty="0" spc="-2" kern="0">
+              <a:t> làm</a:t>
+            </a:r>
+            <a:r>
+              <a:rPr lang="en-US" sz="6900" dirty="0" spc="-21" kern="0">
                 <a:solidFill>
                   <a:srgbClr val="F3EEE3"/>
                 </a:solidFill>
@@ -8021,31 +8021,9 @@
                 <a:ea typeface="Bricolage Grotesque ExtraBold" pitchFamily="34" charset="-122"/>
                 <a:cs typeface="Bricolage Grotesque ExtraBold" pitchFamily="34" charset="-120"/>
               </a:rPr>
-              <a:t> CD</a:t>
-            </a:r>
-            <a:r>
-              <a:rPr lang="en-US" sz="5700" dirty="0" spc="-3" kern="0">
-                <a:solidFill>
-                  <a:srgbClr val="F3EEE3"/>
-                </a:solidFill>
-                <a:latin typeface="Bricolage Grotesque ExtraBold" pitchFamily="34" charset="0"/>
-                <a:ea typeface="Bricolage Grotesque ExtraBold" pitchFamily="34" charset="-122"/>
-                <a:cs typeface="Bricolage Grotesque ExtraBold" pitchFamily="34" charset="-120"/>
-              </a:rPr>
-              <a:t> làm</a:t>
-            </a:r>
-            <a:r>
-              <a:rPr lang="en-US" sz="5700" dirty="0" spc="-19" kern="0">
-                <a:solidFill>
-                  <a:srgbClr val="F3EEE3"/>
-                </a:solidFill>
-                <a:latin typeface="Bricolage Grotesque ExtraBold" pitchFamily="34" charset="0"/>
-                <a:ea typeface="Bricolage Grotesque ExtraBold" pitchFamily="34" charset="-122"/>
-                <a:cs typeface="Bricolage Grotesque ExtraBold" pitchFamily="34" charset="-120"/>
-              </a:rPr>
               <a:t> gì?</a:t>
             </a:r>
-            <a:endParaRPr lang="en-US" sz="5700" dirty="0"/>
+            <a:endParaRPr lang="en-US" sz="6900" dirty="0"/>
           </a:p>
         </p:txBody>
       </p:sp>

--- a/system-design-101/vi/lessons/sd-13-009/slides/sd-13-009.pptx
+++ b/system-design-101/vi/lessons/sd-13-009/slides/sd-13-009.pptx
@@ -5616,6 +5616,28 @@
                 <a:ea typeface="Be Vietnam Pro" pitchFamily="34" charset="-122"/>
                 <a:cs typeface="Be Vietnam Pro" pitchFamily="34" charset="-120"/>
               </a:rPr>
+              <a:t> bí</a:t>
+            </a:r>
+            <a:r>
+              <a:rPr lang="en-US" sz="3000" dirty="0" spc="-15" kern="0">
+                <a:solidFill>
+                  <a:srgbClr val="14161C"/>
+                </a:solidFill>
+                <a:latin typeface="Be Vietnam Pro" pitchFamily="34" charset="0"/>
+                <a:ea typeface="Be Vietnam Pro" pitchFamily="34" charset="-122"/>
+                <a:cs typeface="Be Vietnam Pro" pitchFamily="34" charset="-120"/>
+              </a:rPr>
+              <a:t> mật</a:t>
+            </a:r>
+            <a:r>
+              <a:rPr lang="en-US" sz="3000" dirty="0" spc="4" kern="0">
+                <a:solidFill>
+                  <a:srgbClr val="14161C"/>
+                </a:solidFill>
+                <a:latin typeface="Be Vietnam Pro" pitchFamily="34" charset="0"/>
+                <a:ea typeface="Be Vietnam Pro" pitchFamily="34" charset="-122"/>
+                <a:cs typeface="Be Vietnam Pro" pitchFamily="34" charset="-120"/>
+              </a:rPr>
               <a:t> ở</a:t>
             </a:r>
             <a:r>
@@ -5630,39 +5652,6 @@
               <a:t> kho</a:t>
             </a:r>
             <a:r>
-              <a:rPr lang="en-US" sz="3000" dirty="0" spc="4" kern="0">
-                <a:solidFill>
-                  <a:srgbClr val="14161C"/>
-                </a:solidFill>
-                <a:latin typeface="Be Vietnam Pro" pitchFamily="34" charset="0"/>
-                <a:ea typeface="Be Vietnam Pro" pitchFamily="34" charset="-122"/>
-                <a:cs typeface="Be Vietnam Pro" pitchFamily="34" charset="-120"/>
-              </a:rPr>
-              <a:t> bí</a:t>
-            </a:r>
-            <a:r>
-              <a:rPr lang="en-US" sz="3000" dirty="0" spc="-15" kern="0">
-                <a:solidFill>
-                  <a:srgbClr val="14161C"/>
-                </a:solidFill>
-                <a:latin typeface="Be Vietnam Pro" pitchFamily="34" charset="0"/>
-                <a:ea typeface="Be Vietnam Pro" pitchFamily="34" charset="-122"/>
-                <a:cs typeface="Be Vietnam Pro" pitchFamily="34" charset="-120"/>
-              </a:rPr>
-              <a:t> mật</a:t>
-            </a:r>
-            <a:r>
-              <a:rPr lang="en-US" sz="3000" dirty="0" spc="-2" kern="0">
-                <a:solidFill>
-                  <a:srgbClr val="14161C"/>
-                </a:solidFill>
-                <a:latin typeface="Be Vietnam Pro" pitchFamily="34" charset="0"/>
-                <a:ea typeface="Be Vietnam Pro" pitchFamily="34" charset="-122"/>
-                <a:cs typeface="Be Vietnam Pro" pitchFamily="34" charset="-120"/>
-              </a:rPr>
-              <a:t> bên</a:t>
-            </a:r>
-            <a:r>
               <a:rPr lang="en-US" sz="3000" dirty="0" spc="-11" kern="0">
                 <a:solidFill>
                   <a:srgbClr val="14161C"/>
@@ -5674,7 +5663,7 @@
               <a:t> ngoài,</a:t>
             </a:r>
             <a:r>
-              <a:rPr lang="en-US" sz="3000" dirty="0" spc="13" kern="0">
+              <a:rPr lang="en-US" sz="3000" dirty="0" spc="14" kern="0">
                 <a:solidFill>
                   <a:srgbClr val="14161C"/>
                 </a:solidFill>
@@ -5685,29 +5674,29 @@
               <a:t> đồng</a:t>
             </a:r>
             <a:r>
+              <a:rPr lang="en-US" sz="3000" dirty="0" spc="-1" kern="0">
+                <a:solidFill>
+                  <a:srgbClr val="14161C"/>
+                </a:solidFill>
+                <a:latin typeface="Be Vietnam Pro" pitchFamily="34" charset="0"/>
+                <a:ea typeface="Be Vietnam Pro" pitchFamily="34" charset="-122"/>
+                <a:cs typeface="Be Vietnam Pro" pitchFamily="34" charset="-120"/>
+              </a:rPr>
+              <a:t> bộ</a:t>
+            </a:r>
+            <a:r>
+              <a:rPr lang="en-US" sz="3000" dirty="0" spc="-14" kern="0">
+                <a:solidFill>
+                  <a:srgbClr val="14161C"/>
+                </a:solidFill>
+                <a:latin typeface="Be Vietnam Pro" pitchFamily="34" charset="0"/>
+                <a:ea typeface="Be Vietnam Pro" pitchFamily="34" charset="-122"/>
+                <a:cs typeface="Be Vietnam Pro" pitchFamily="34" charset="-120"/>
+              </a:rPr>
+              <a:t> vào</a:t>
+            </a:r>
+            <a:r>
               <a:rPr lang="en-US" sz="3000" dirty="0" spc="0" kern="0">
-                <a:solidFill>
-                  <a:srgbClr val="14161C"/>
-                </a:solidFill>
-                <a:latin typeface="Be Vietnam Pro" pitchFamily="34" charset="0"/>
-                <a:ea typeface="Be Vietnam Pro" pitchFamily="34" charset="-122"/>
-                <a:cs typeface="Be Vietnam Pro" pitchFamily="34" charset="-120"/>
-              </a:rPr>
-              <a:t> bộ</a:t>
-            </a:r>
-            <a:r>
-              <a:rPr lang="en-US" sz="3000" dirty="0" spc="-15" kern="0">
-                <a:solidFill>
-                  <a:srgbClr val="14161C"/>
-                </a:solidFill>
-                <a:latin typeface="Be Vietnam Pro" pitchFamily="34" charset="0"/>
-                <a:ea typeface="Be Vietnam Pro" pitchFamily="34" charset="-122"/>
-                <a:cs typeface="Be Vietnam Pro" pitchFamily="34" charset="-120"/>
-              </a:rPr>
-              <a:t> vào</a:t>
-            </a:r>
-            <a:r>
-              <a:rPr lang="en-US" sz="3000" dirty="0" spc="1" kern="0">
                 <a:solidFill>
                   <a:srgbClr val="14161C"/>
                 </a:solidFill>
@@ -7130,17 +7119,6 @@
               <a:t> cụm</a:t>
             </a:r>
             <a:r>
-              <a:rPr lang="en-US" sz="2850" dirty="0" spc="17" kern="0">
-                <a:solidFill>
-                  <a:srgbClr val="14161C"/>
-                </a:solidFill>
-                <a:latin typeface="Be Vietnam Pro SemiBold" pitchFamily="34" charset="0"/>
-                <a:ea typeface="Be Vietnam Pro SemiBold" pitchFamily="34" charset="-122"/>
-                <a:cs typeface="Be Vietnam Pro SemiBold" pitchFamily="34" charset="-120"/>
-              </a:rPr>
-              <a:t> đã</a:t>
-            </a:r>
-            <a:r>
               <a:rPr lang="en-US" sz="2850" dirty="0" spc="-2" kern="0">
                 <a:solidFill>
                   <a:srgbClr val="14161C"/>
@@ -7152,7 +7130,7 @@
               <a:t> có</a:t>
             </a:r>
             <a:r>
-              <a:rPr lang="en-US" sz="2850" dirty="0" spc="13" kern="0">
+              <a:rPr lang="en-US" sz="2850" dirty="0" spc="14" kern="0">
                 <a:solidFill>
                   <a:srgbClr val="14161C"/>
                 </a:solidFill>
@@ -7163,7 +7141,7 @@
               <a:t> chức</a:t>
             </a:r>
             <a:r>
-              <a:rPr lang="en-US" sz="2850" dirty="0" spc="-3" kern="0">
+              <a:rPr lang="en-US" sz="2850" dirty="0" spc="-4" kern="0">
                 <a:solidFill>
                   <a:srgbClr val="14161C"/>
                 </a:solidFill>
@@ -7174,7 +7152,7 @@
               <a:t> năng</a:t>
             </a:r>
             <a:r>
-              <a:rPr lang="en-US" sz="2850" dirty="0" spc="13" kern="0">
+              <a:rPr lang="en-US" sz="2850" dirty="0" spc="14" kern="0">
                 <a:solidFill>
                   <a:srgbClr val="14161C"/>
                 </a:solidFill>
@@ -7185,7 +7163,7 @@
               <a:t> đó</a:t>
             </a:r>
             <a:r>
-              <a:rPr lang="en-US" sz="2850" dirty="0" spc="9" kern="0">
+              <a:rPr lang="en-US" sz="2850" dirty="0" spc="8" kern="0">
                 <a:solidFill>
                   <a:srgbClr val="14161C"/>
                 </a:solidFill>
@@ -7257,15 +7235,15 @@
               <a:t> cầu</a:t>
             </a:r>
             <a:r>
-              <a:rPr lang="en-US" sz="2850" dirty="0" spc="1" kern="0">
-                <a:solidFill>
-                  <a:srgbClr val="14161C"/>
-                </a:solidFill>
-                <a:latin typeface="Be Vietnam Pro SemiBold" pitchFamily="34" charset="0"/>
-                <a:ea typeface="Be Vietnam Pro SemiBold" pitchFamily="34" charset="-122"/>
-                <a:cs typeface="Be Vietnam Pro SemiBold" pitchFamily="34" charset="-120"/>
-              </a:rPr>
-              <a:t> chỉ là</a:t>
+              <a:rPr lang="en-US" sz="2850" dirty="0" spc="0" kern="0">
+                <a:solidFill>
+                  <a:srgbClr val="14161C"/>
+                </a:solidFill>
+                <a:latin typeface="Be Vietnam Pro SemiBold" pitchFamily="34" charset="0"/>
+                <a:ea typeface="Be Vietnam Pro SemiBold" pitchFamily="34" charset="-122"/>
+                <a:cs typeface="Be Vietnam Pro SemiBold" pitchFamily="34" charset="-120"/>
+              </a:rPr>
+              <a:t> là</a:t>
             </a:r>
             <a:r>
               <a:rPr lang="en-US" sz="2850" dirty="0" spc="19" kern="0">
@@ -7437,17 +7415,6 @@
                 <a:cs typeface="Be Vietnam Pro SemiBold" pitchFamily="34" charset="-120"/>
               </a:rPr>
               <a:t> không</a:t>
-            </a:r>
-            <a:r>
-              <a:rPr lang="en-US" sz="2850" dirty="0" spc="-2" kern="0">
-                <a:solidFill>
-                  <a:srgbClr val="14161C"/>
-                </a:solidFill>
-                <a:latin typeface="Be Vietnam Pro SemiBold" pitchFamily="34" charset="0"/>
-                <a:ea typeface="Be Vietnam Pro SemiBold" pitchFamily="34" charset="-122"/>
-                <a:cs typeface="Be Vietnam Pro SemiBold" pitchFamily="34" charset="-120"/>
-              </a:rPr>
-              <a:t> phải</a:t>
             </a:r>
             <a:r>
               <a:rPr lang="en-US" sz="2850" dirty="0" spc="-14" kern="0">

--- a/system-design-101/vi/lessons/sd-13-009/slides/sd-13-009.pptx
+++ b/system-design-101/vi/lessons/sd-13-009/slides/sd-13-009.pptx
@@ -8445,7 +8445,7 @@
               <a:t>BẬT</a:t>
             </a:r>
             <a:r>
-              <a:rPr lang="en-US" sz="2250" b="1" spc="224" kern="0" dirty="0">
+              <a:rPr lang="en-US" sz="2250" b="1" spc="221" kern="0" dirty="0">
                 <a:solidFill>
                   <a:srgbClr val="FFB454"/>
                 </a:solidFill>
@@ -8453,7 +8453,7 @@
                 <a:ea typeface="Be Vietnam Pro" pitchFamily="34" charset="-122"/>
                 <a:cs typeface="Be Vietnam Pro" pitchFamily="34" charset="-120"/>
               </a:rPr>
-              <a:t> SELFHEAL</a:t>
+              <a:t> selfHeal</a:t>
             </a:r>
             <a:endParaRPr lang="en-US" sz="2250" dirty="0"/>
           </a:p>
